--- a/01_DOCUMENTOS_ACADEMICOS_FIME/Presentacion_Final_Proyecto_Expendex_FIME.pptx
+++ b/01_DOCUMENTOS_ACADEMICOS_FIME/Presentacion_Final_Proyecto_Expendex_FIME.pptx
@@ -3334,30 +3334,27 @@
           </a:bodyPr>
           <a:lstStyle/>
           <a:p>
-            <a:r>
-              <a:rPr sz="2050" b="1">
-                <a:solidFill>
-                  <a:srgbClr val="FFFFFF"/>
-                </a:solidFill>
-                <a:latin typeface="Calibri"/>
-              </a:rPr>
-              <a:t>EXPENDEX®: MICRO-RESTAURANTE AUTOMATIZADO IOT HÍBRIDO DE 36 CANALES MIXTOS (1+4+1)</a:t>
-            </a:r>
-          </a:p>
-          <a:p>
             <a:pPr>
-              <a:spcBef>
-                <a:spcPts val="400"/>
-              </a:spcBef>
+              <a:defRPr sz="2200" b="1">
+                <a:solidFill>
+                  <a:srgbClr val="F0F6FC"/>
+                </a:solidFill>
+              </a:defRPr>
             </a:pPr>
             <a:r>
-              <a:rPr sz="1100">
-                <a:solidFill>
-                  <a:srgbClr val="CBD5E1"/>
-                </a:solidFill>
-                <a:latin typeface="Calibri"/>
-              </a:rPr>
-              <a:t>Máquina Expendedora Inteligente de Comida Casera en Recipientes Cuadrados de 3 Divisiones y Bebidas Frías (2–4 °C), con Gabinete de Paredes Lisas, 3 Bisagras en Puerta, Compuerta Inferior con 2 Bisagras Superiores sin Manija, Matriz MOSFET 6×6 en EasyEDA, Plataforma Web Dual (10.1") y Simulación de 36 LEDs en VS Code + Wokwi</a:t>
+              <a:t>EXPENDEX®: MÁQUINA AUTOMATIZADA HÍBRIDA IOT DE 36 CANALES (1+4+1)</a:t>
+            </a:r>
+          </a:p>
+          <a:p>
+            <a:pPr>
+              <a:defRPr sz="2200" b="1">
+                <a:solidFill>
+                  <a:srgbClr val="F0F6FC"/>
+                </a:solidFill>
+              </a:defRPr>
+            </a:pPr>
+            <a:r>
+              <a:t>SOLUCIÓN MECATRÓNICA DE DISPENSADO NUTRIMENTAL PARA ENTORNOS UNIVERSITARIOS</a:t>
             </a:r>
           </a:p>
         </p:txBody>
@@ -3716,25 +3713,26 @@
           <a:bodyPr rtlCol="0" anchor="ctr" wrap="square"/>
           <a:lstStyle/>
           <a:p>
-            <a:pPr algn="ctr"/>
-            <a:r>
-              <a:rPr sz="1150" b="1">
-                <a:solidFill>
-                  <a:srgbClr val="F59E0B"/>
-                </a:solidFill>
-                <a:latin typeface="Calibri"/>
-              </a:rPr>
-              <a:t>DOCENTE TITULAR: Ing. Mario Alberto González Vázquez   |   GRUPO: 005   |   SEMESTRE: Ago–Dic 2026</a:t>
-            </a:r>
-          </a:p>
-          <a:p>
-            <a:r>
-              <a:rPr sz="1019">
-                <a:solidFill>
-                  <a:srgbClr val="FFFFFF"/>
-                </a:solidFill>
-                <a:latin typeface="Calibri"/>
-              </a:rPr>
+            <a:pPr>
+              <a:defRPr sz="1300">
+                <a:solidFill>
+                  <a:srgbClr val="F0F6FC"/>
+                </a:solidFill>
+              </a:defRPr>
+            </a:pPr>
+            <a:r>
+              <a:t>DOCENTE TITULAR: Ing. Mario Alberto González Vázquez   |   GRUPO: 005   |   SALÓN: 7208   |   JUEVES M4 A M6</a:t>
+            </a:r>
+          </a:p>
+          <a:p>
+            <a:pPr>
+              <a:defRPr sz="1300">
+                <a:solidFill>
+                  <a:srgbClr val="F0F6FC"/>
+                </a:solidFill>
+              </a:defRPr>
+            </a:pPr>
+            <a:r>
               <a:t>Síntesis Integral de las 5 Actividades Fundamentales: AF1, AF2, AF3 (PIA), AF4 y AF5</a:t>
             </a:r>
           </a:p>
@@ -13407,7 +13405,7 @@
                 </a:solidFill>
                 <a:latin typeface="Calibri"/>
               </a:rPr>
-              <a:t>Ventana libre entre clases vs 25-35 min de fila en cafeterías</a:t>
+              <a:t>Ventana libre entre clases vs 25-20 min de fila en cafeterías</a:t>
             </a:r>
           </a:p>
         </p:txBody>
@@ -16323,7 +16321,7 @@
                 </a:solidFill>
                 <a:latin typeface="Calibri"/>
               </a:rPr>
-              <a:t>Diseñar, modelar, simular y validar un micro-restaurante automatizado IoT híbrido de 36 canales (1+4+1) capaz de almacenar y dispensar 60 comidas caseras en envase cuadrado de 3 divisiones y 168 bebidas frías bajo norma NOM-251.</a:t>
+              <a:t>Diseñar, modelar, simular y validar un máquina automatizada híbrida automatizado IoT híbrido de 36 canales (1+4+1) capaz de almacenar y dispensar 60 comidas caseras en envase cuadrado de 3 divisiones y 168 bebidas frías bajo norma NOM-251.</a:t>
             </a:r>
           </a:p>
           <a:p>
